--- a/Data/PPT_Learn/PPT_File/34.pptx
+++ b/Data/PPT_Learn/PPT_File/34.pptx
@@ -140,7 +140,7 @@
           <p:cNvPr id="2" name="Title 1">
             <a:extLst>
               <a:ext uri="{FF2B5EF4-FFF2-40B4-BE49-F238E27FC236}">
-                <a16:creationId xmlns="" xmlns:a16="http://schemas.microsoft.com/office/drawing/2014/main" id="{26A19375-BA90-60D8-711B-BFB34327815F}"/>
+                <a16:creationId xmlns:a16="http://schemas.microsoft.com/office/drawing/2014/main" id="{26A19375-BA90-60D8-711B-BFB34327815F}"/>
               </a:ext>
             </a:extLst>
           </p:cNvPr>
@@ -177,7 +177,7 @@
           <p:cNvPr id="3" name="Subtitle 2">
             <a:extLst>
               <a:ext uri="{FF2B5EF4-FFF2-40B4-BE49-F238E27FC236}">
-                <a16:creationId xmlns="" xmlns:a16="http://schemas.microsoft.com/office/drawing/2014/main" id="{FF432E36-2BC1-E81F-867B-A1A9C2AF3CE2}"/>
+                <a16:creationId xmlns:a16="http://schemas.microsoft.com/office/drawing/2014/main" id="{FF432E36-2BC1-E81F-867B-A1A9C2AF3CE2}"/>
               </a:ext>
             </a:extLst>
           </p:cNvPr>
@@ -247,7 +247,7 @@
           <p:cNvPr id="4" name="Date Placeholder 3">
             <a:extLst>
               <a:ext uri="{FF2B5EF4-FFF2-40B4-BE49-F238E27FC236}">
-                <a16:creationId xmlns="" xmlns:a16="http://schemas.microsoft.com/office/drawing/2014/main" id="{A23665B2-B681-557E-FF2C-42B89E0DCAD2}"/>
+                <a16:creationId xmlns:a16="http://schemas.microsoft.com/office/drawing/2014/main" id="{A23665B2-B681-557E-FF2C-42B89E0DCAD2}"/>
               </a:ext>
             </a:extLst>
           </p:cNvPr>
@@ -265,7 +265,7 @@
           <a:p>
             <a:fld id="{3F332693-48B5-49C3-AA51-43C9BC0BDF86}" type="datetimeFigureOut">
               <a:rPr lang="en-US" smtClean="0"/>
-              <a:t>13-02-2024</a:t>
+              <a:t>12/1/2025</a:t>
             </a:fld>
             <a:endParaRPr lang="en-US"/>
           </a:p>
@@ -276,7 +276,7 @@
           <p:cNvPr id="5" name="Footer Placeholder 4">
             <a:extLst>
               <a:ext uri="{FF2B5EF4-FFF2-40B4-BE49-F238E27FC236}">
-                <a16:creationId xmlns="" xmlns:a16="http://schemas.microsoft.com/office/drawing/2014/main" id="{90259D25-C8BD-1AC3-D24E-65DFEB4B97D7}"/>
+                <a16:creationId xmlns:a16="http://schemas.microsoft.com/office/drawing/2014/main" id="{90259D25-C8BD-1AC3-D24E-65DFEB4B97D7}"/>
               </a:ext>
             </a:extLst>
           </p:cNvPr>
@@ -301,7 +301,7 @@
           <p:cNvPr id="6" name="Slide Number Placeholder 5">
             <a:extLst>
               <a:ext uri="{FF2B5EF4-FFF2-40B4-BE49-F238E27FC236}">
-                <a16:creationId xmlns="" xmlns:a16="http://schemas.microsoft.com/office/drawing/2014/main" id="{1CE892BD-503D-E340-5841-A71F8841A417}"/>
+                <a16:creationId xmlns:a16="http://schemas.microsoft.com/office/drawing/2014/main" id="{1CE892BD-503D-E340-5841-A71F8841A417}"/>
               </a:ext>
             </a:extLst>
           </p:cNvPr>
@@ -360,7 +360,7 @@
           <p:cNvPr id="2" name="Title 1">
             <a:extLst>
               <a:ext uri="{FF2B5EF4-FFF2-40B4-BE49-F238E27FC236}">
-                <a16:creationId xmlns="" xmlns:a16="http://schemas.microsoft.com/office/drawing/2014/main" id="{CFF76727-E16D-7E9A-1B46-213C4E8CD5BB}"/>
+                <a16:creationId xmlns:a16="http://schemas.microsoft.com/office/drawing/2014/main" id="{CFF76727-E16D-7E9A-1B46-213C4E8CD5BB}"/>
               </a:ext>
             </a:extLst>
           </p:cNvPr>
@@ -388,7 +388,7 @@
           <p:cNvPr id="3" name="Vertical Text Placeholder 2">
             <a:extLst>
               <a:ext uri="{FF2B5EF4-FFF2-40B4-BE49-F238E27FC236}">
-                <a16:creationId xmlns="" xmlns:a16="http://schemas.microsoft.com/office/drawing/2014/main" id="{4646ABE4-68C9-EC7E-7E61-D740979348B6}"/>
+                <a16:creationId xmlns:a16="http://schemas.microsoft.com/office/drawing/2014/main" id="{4646ABE4-68C9-EC7E-7E61-D740979348B6}"/>
               </a:ext>
             </a:extLst>
           </p:cNvPr>
@@ -445,7 +445,7 @@
           <p:cNvPr id="4" name="Date Placeholder 3">
             <a:extLst>
               <a:ext uri="{FF2B5EF4-FFF2-40B4-BE49-F238E27FC236}">
-                <a16:creationId xmlns="" xmlns:a16="http://schemas.microsoft.com/office/drawing/2014/main" id="{816D1548-AA04-669B-F6EE-E49F5E279506}"/>
+                <a16:creationId xmlns:a16="http://schemas.microsoft.com/office/drawing/2014/main" id="{816D1548-AA04-669B-F6EE-E49F5E279506}"/>
               </a:ext>
             </a:extLst>
           </p:cNvPr>
@@ -463,7 +463,7 @@
           <a:p>
             <a:fld id="{3F332693-48B5-49C3-AA51-43C9BC0BDF86}" type="datetimeFigureOut">
               <a:rPr lang="en-US" smtClean="0"/>
-              <a:t>13-02-2024</a:t>
+              <a:t>12/1/2025</a:t>
             </a:fld>
             <a:endParaRPr lang="en-US"/>
           </a:p>
@@ -474,7 +474,7 @@
           <p:cNvPr id="5" name="Footer Placeholder 4">
             <a:extLst>
               <a:ext uri="{FF2B5EF4-FFF2-40B4-BE49-F238E27FC236}">
-                <a16:creationId xmlns="" xmlns:a16="http://schemas.microsoft.com/office/drawing/2014/main" id="{6F6961E5-EB5D-A2BA-BD07-7CE0E1FFC678}"/>
+                <a16:creationId xmlns:a16="http://schemas.microsoft.com/office/drawing/2014/main" id="{6F6961E5-EB5D-A2BA-BD07-7CE0E1FFC678}"/>
               </a:ext>
             </a:extLst>
           </p:cNvPr>
@@ -499,7 +499,7 @@
           <p:cNvPr id="6" name="Slide Number Placeholder 5">
             <a:extLst>
               <a:ext uri="{FF2B5EF4-FFF2-40B4-BE49-F238E27FC236}">
-                <a16:creationId xmlns="" xmlns:a16="http://schemas.microsoft.com/office/drawing/2014/main" id="{3526A2DD-C86F-9D02-0E70-4D82D4D7EE50}"/>
+                <a16:creationId xmlns:a16="http://schemas.microsoft.com/office/drawing/2014/main" id="{3526A2DD-C86F-9D02-0E70-4D82D4D7EE50}"/>
               </a:ext>
             </a:extLst>
           </p:cNvPr>
@@ -558,7 +558,7 @@
           <p:cNvPr id="2" name="Vertical Title 1">
             <a:extLst>
               <a:ext uri="{FF2B5EF4-FFF2-40B4-BE49-F238E27FC236}">
-                <a16:creationId xmlns="" xmlns:a16="http://schemas.microsoft.com/office/drawing/2014/main" id="{2153709F-D9D5-7FF0-2C18-155BCA674C82}"/>
+                <a16:creationId xmlns:a16="http://schemas.microsoft.com/office/drawing/2014/main" id="{2153709F-D9D5-7FF0-2C18-155BCA674C82}"/>
               </a:ext>
             </a:extLst>
           </p:cNvPr>
@@ -591,7 +591,7 @@
           <p:cNvPr id="3" name="Vertical Text Placeholder 2">
             <a:extLst>
               <a:ext uri="{FF2B5EF4-FFF2-40B4-BE49-F238E27FC236}">
-                <a16:creationId xmlns="" xmlns:a16="http://schemas.microsoft.com/office/drawing/2014/main" id="{926AD49A-E34C-2FFF-25AD-9F2A5F54DBDC}"/>
+                <a16:creationId xmlns:a16="http://schemas.microsoft.com/office/drawing/2014/main" id="{926AD49A-E34C-2FFF-25AD-9F2A5F54DBDC}"/>
               </a:ext>
             </a:extLst>
           </p:cNvPr>
@@ -653,7 +653,7 @@
           <p:cNvPr id="4" name="Date Placeholder 3">
             <a:extLst>
               <a:ext uri="{FF2B5EF4-FFF2-40B4-BE49-F238E27FC236}">
-                <a16:creationId xmlns="" xmlns:a16="http://schemas.microsoft.com/office/drawing/2014/main" id="{BC3959D0-2330-4424-7D9C-3C956BDCA81A}"/>
+                <a16:creationId xmlns:a16="http://schemas.microsoft.com/office/drawing/2014/main" id="{BC3959D0-2330-4424-7D9C-3C956BDCA81A}"/>
               </a:ext>
             </a:extLst>
           </p:cNvPr>
@@ -671,7 +671,7 @@
           <a:p>
             <a:fld id="{3F332693-48B5-49C3-AA51-43C9BC0BDF86}" type="datetimeFigureOut">
               <a:rPr lang="en-US" smtClean="0"/>
-              <a:t>13-02-2024</a:t>
+              <a:t>12/1/2025</a:t>
             </a:fld>
             <a:endParaRPr lang="en-US"/>
           </a:p>
@@ -682,7 +682,7 @@
           <p:cNvPr id="5" name="Footer Placeholder 4">
             <a:extLst>
               <a:ext uri="{FF2B5EF4-FFF2-40B4-BE49-F238E27FC236}">
-                <a16:creationId xmlns="" xmlns:a16="http://schemas.microsoft.com/office/drawing/2014/main" id="{B3863563-8083-758A-29C3-F6535DFC50C6}"/>
+                <a16:creationId xmlns:a16="http://schemas.microsoft.com/office/drawing/2014/main" id="{B3863563-8083-758A-29C3-F6535DFC50C6}"/>
               </a:ext>
             </a:extLst>
           </p:cNvPr>
@@ -707,7 +707,7 @@
           <p:cNvPr id="6" name="Slide Number Placeholder 5">
             <a:extLst>
               <a:ext uri="{FF2B5EF4-FFF2-40B4-BE49-F238E27FC236}">
-                <a16:creationId xmlns="" xmlns:a16="http://schemas.microsoft.com/office/drawing/2014/main" id="{2D2A29E8-A58D-23AF-ACF8-8FD3426F0247}"/>
+                <a16:creationId xmlns:a16="http://schemas.microsoft.com/office/drawing/2014/main" id="{2D2A29E8-A58D-23AF-ACF8-8FD3426F0247}"/>
               </a:ext>
             </a:extLst>
           </p:cNvPr>
@@ -766,7 +766,7 @@
           <p:cNvPr id="2" name="Title 1">
             <a:extLst>
               <a:ext uri="{FF2B5EF4-FFF2-40B4-BE49-F238E27FC236}">
-                <a16:creationId xmlns="" xmlns:a16="http://schemas.microsoft.com/office/drawing/2014/main" id="{94E381C6-9130-BBD8-BC10-2303CEDE7274}"/>
+                <a16:creationId xmlns:a16="http://schemas.microsoft.com/office/drawing/2014/main" id="{94E381C6-9130-BBD8-BC10-2303CEDE7274}"/>
               </a:ext>
             </a:extLst>
           </p:cNvPr>
@@ -794,7 +794,7 @@
           <p:cNvPr id="3" name="Content Placeholder 2">
             <a:extLst>
               <a:ext uri="{FF2B5EF4-FFF2-40B4-BE49-F238E27FC236}">
-                <a16:creationId xmlns="" xmlns:a16="http://schemas.microsoft.com/office/drawing/2014/main" id="{628E9105-7FCC-7865-7FA9-03FD7A0B981D}"/>
+                <a16:creationId xmlns:a16="http://schemas.microsoft.com/office/drawing/2014/main" id="{628E9105-7FCC-7865-7FA9-03FD7A0B981D}"/>
               </a:ext>
             </a:extLst>
           </p:cNvPr>
@@ -851,7 +851,7 @@
           <p:cNvPr id="4" name="Date Placeholder 3">
             <a:extLst>
               <a:ext uri="{FF2B5EF4-FFF2-40B4-BE49-F238E27FC236}">
-                <a16:creationId xmlns="" xmlns:a16="http://schemas.microsoft.com/office/drawing/2014/main" id="{A5EA70A4-4FA3-58FC-5B16-C7E10E379683}"/>
+                <a16:creationId xmlns:a16="http://schemas.microsoft.com/office/drawing/2014/main" id="{A5EA70A4-4FA3-58FC-5B16-C7E10E379683}"/>
               </a:ext>
             </a:extLst>
           </p:cNvPr>
@@ -869,7 +869,7 @@
           <a:p>
             <a:fld id="{3F332693-48B5-49C3-AA51-43C9BC0BDF86}" type="datetimeFigureOut">
               <a:rPr lang="en-US" smtClean="0"/>
-              <a:t>13-02-2024</a:t>
+              <a:t>12/1/2025</a:t>
             </a:fld>
             <a:endParaRPr lang="en-US"/>
           </a:p>
@@ -880,7 +880,7 @@
           <p:cNvPr id="5" name="Footer Placeholder 4">
             <a:extLst>
               <a:ext uri="{FF2B5EF4-FFF2-40B4-BE49-F238E27FC236}">
-                <a16:creationId xmlns="" xmlns:a16="http://schemas.microsoft.com/office/drawing/2014/main" id="{B8D78057-8C48-3253-5F88-7199C765D93C}"/>
+                <a16:creationId xmlns:a16="http://schemas.microsoft.com/office/drawing/2014/main" id="{B8D78057-8C48-3253-5F88-7199C765D93C}"/>
               </a:ext>
             </a:extLst>
           </p:cNvPr>
@@ -905,7 +905,7 @@
           <p:cNvPr id="6" name="Slide Number Placeholder 5">
             <a:extLst>
               <a:ext uri="{FF2B5EF4-FFF2-40B4-BE49-F238E27FC236}">
-                <a16:creationId xmlns="" xmlns:a16="http://schemas.microsoft.com/office/drawing/2014/main" id="{38E88CEC-1280-6B69-2862-382D5B9C7F41}"/>
+                <a16:creationId xmlns:a16="http://schemas.microsoft.com/office/drawing/2014/main" id="{38E88CEC-1280-6B69-2862-382D5B9C7F41}"/>
               </a:ext>
             </a:extLst>
           </p:cNvPr>
@@ -964,7 +964,7 @@
           <p:cNvPr id="2" name="Title 1">
             <a:extLst>
               <a:ext uri="{FF2B5EF4-FFF2-40B4-BE49-F238E27FC236}">
-                <a16:creationId xmlns="" xmlns:a16="http://schemas.microsoft.com/office/drawing/2014/main" id="{ED70F023-EBAC-78B5-75C5-5BB3875057F6}"/>
+                <a16:creationId xmlns:a16="http://schemas.microsoft.com/office/drawing/2014/main" id="{ED70F023-EBAC-78B5-75C5-5BB3875057F6}"/>
               </a:ext>
             </a:extLst>
           </p:cNvPr>
@@ -1001,7 +1001,7 @@
           <p:cNvPr id="3" name="Text Placeholder 2">
             <a:extLst>
               <a:ext uri="{FF2B5EF4-FFF2-40B4-BE49-F238E27FC236}">
-                <a16:creationId xmlns="" xmlns:a16="http://schemas.microsoft.com/office/drawing/2014/main" id="{167E2BF2-95B2-ED5B-0FF0-4A5AF12F348C}"/>
+                <a16:creationId xmlns:a16="http://schemas.microsoft.com/office/drawing/2014/main" id="{167E2BF2-95B2-ED5B-0FF0-4A5AF12F348C}"/>
               </a:ext>
             </a:extLst>
           </p:cNvPr>
@@ -1126,7 +1126,7 @@
           <p:cNvPr id="4" name="Date Placeholder 3">
             <a:extLst>
               <a:ext uri="{FF2B5EF4-FFF2-40B4-BE49-F238E27FC236}">
-                <a16:creationId xmlns="" xmlns:a16="http://schemas.microsoft.com/office/drawing/2014/main" id="{33000535-6B30-C3F7-2954-C2BB9C5A0272}"/>
+                <a16:creationId xmlns:a16="http://schemas.microsoft.com/office/drawing/2014/main" id="{33000535-6B30-C3F7-2954-C2BB9C5A0272}"/>
               </a:ext>
             </a:extLst>
           </p:cNvPr>
@@ -1144,7 +1144,7 @@
           <a:p>
             <a:fld id="{3F332693-48B5-49C3-AA51-43C9BC0BDF86}" type="datetimeFigureOut">
               <a:rPr lang="en-US" smtClean="0"/>
-              <a:t>13-02-2024</a:t>
+              <a:t>12/1/2025</a:t>
             </a:fld>
             <a:endParaRPr lang="en-US"/>
           </a:p>
@@ -1155,7 +1155,7 @@
           <p:cNvPr id="5" name="Footer Placeholder 4">
             <a:extLst>
               <a:ext uri="{FF2B5EF4-FFF2-40B4-BE49-F238E27FC236}">
-                <a16:creationId xmlns="" xmlns:a16="http://schemas.microsoft.com/office/drawing/2014/main" id="{58B898B1-C154-6636-4302-88FBDE2164FA}"/>
+                <a16:creationId xmlns:a16="http://schemas.microsoft.com/office/drawing/2014/main" id="{58B898B1-C154-6636-4302-88FBDE2164FA}"/>
               </a:ext>
             </a:extLst>
           </p:cNvPr>
@@ -1180,7 +1180,7 @@
           <p:cNvPr id="6" name="Slide Number Placeholder 5">
             <a:extLst>
               <a:ext uri="{FF2B5EF4-FFF2-40B4-BE49-F238E27FC236}">
-                <a16:creationId xmlns="" xmlns:a16="http://schemas.microsoft.com/office/drawing/2014/main" id="{BAB97F68-3642-B78A-2D09-34BC3D5C77F9}"/>
+                <a16:creationId xmlns:a16="http://schemas.microsoft.com/office/drawing/2014/main" id="{BAB97F68-3642-B78A-2D09-34BC3D5C77F9}"/>
               </a:ext>
             </a:extLst>
           </p:cNvPr>
@@ -1239,7 +1239,7 @@
           <p:cNvPr id="2" name="Title 1">
             <a:extLst>
               <a:ext uri="{FF2B5EF4-FFF2-40B4-BE49-F238E27FC236}">
-                <a16:creationId xmlns="" xmlns:a16="http://schemas.microsoft.com/office/drawing/2014/main" id="{EFA729A9-D199-6391-1BC0-324D2936A1FF}"/>
+                <a16:creationId xmlns:a16="http://schemas.microsoft.com/office/drawing/2014/main" id="{EFA729A9-D199-6391-1BC0-324D2936A1FF}"/>
               </a:ext>
             </a:extLst>
           </p:cNvPr>
@@ -1267,7 +1267,7 @@
           <p:cNvPr id="3" name="Content Placeholder 2">
             <a:extLst>
               <a:ext uri="{FF2B5EF4-FFF2-40B4-BE49-F238E27FC236}">
-                <a16:creationId xmlns="" xmlns:a16="http://schemas.microsoft.com/office/drawing/2014/main" id="{1DB131E4-6F28-F78F-26C4-77A928B0D8BC}"/>
+                <a16:creationId xmlns:a16="http://schemas.microsoft.com/office/drawing/2014/main" id="{1DB131E4-6F28-F78F-26C4-77A928B0D8BC}"/>
               </a:ext>
             </a:extLst>
           </p:cNvPr>
@@ -1329,7 +1329,7 @@
           <p:cNvPr id="4" name="Content Placeholder 3">
             <a:extLst>
               <a:ext uri="{FF2B5EF4-FFF2-40B4-BE49-F238E27FC236}">
-                <a16:creationId xmlns="" xmlns:a16="http://schemas.microsoft.com/office/drawing/2014/main" id="{0CDF6402-B3E2-8FBB-415A-98BFE4950697}"/>
+                <a16:creationId xmlns:a16="http://schemas.microsoft.com/office/drawing/2014/main" id="{0CDF6402-B3E2-8FBB-415A-98BFE4950697}"/>
               </a:ext>
             </a:extLst>
           </p:cNvPr>
@@ -1391,7 +1391,7 @@
           <p:cNvPr id="5" name="Date Placeholder 4">
             <a:extLst>
               <a:ext uri="{FF2B5EF4-FFF2-40B4-BE49-F238E27FC236}">
-                <a16:creationId xmlns="" xmlns:a16="http://schemas.microsoft.com/office/drawing/2014/main" id="{DF94F218-B131-730D-B0B9-B3E282EB43B8}"/>
+                <a16:creationId xmlns:a16="http://schemas.microsoft.com/office/drawing/2014/main" id="{DF94F218-B131-730D-B0B9-B3E282EB43B8}"/>
               </a:ext>
             </a:extLst>
           </p:cNvPr>
@@ -1409,7 +1409,7 @@
           <a:p>
             <a:fld id="{3F332693-48B5-49C3-AA51-43C9BC0BDF86}" type="datetimeFigureOut">
               <a:rPr lang="en-US" smtClean="0"/>
-              <a:t>13-02-2024</a:t>
+              <a:t>12/1/2025</a:t>
             </a:fld>
             <a:endParaRPr lang="en-US"/>
           </a:p>
@@ -1420,7 +1420,7 @@
           <p:cNvPr id="6" name="Footer Placeholder 5">
             <a:extLst>
               <a:ext uri="{FF2B5EF4-FFF2-40B4-BE49-F238E27FC236}">
-                <a16:creationId xmlns="" xmlns:a16="http://schemas.microsoft.com/office/drawing/2014/main" id="{83426E11-4060-9C63-30A9-361FD5C8B747}"/>
+                <a16:creationId xmlns:a16="http://schemas.microsoft.com/office/drawing/2014/main" id="{83426E11-4060-9C63-30A9-361FD5C8B747}"/>
               </a:ext>
             </a:extLst>
           </p:cNvPr>
@@ -1445,7 +1445,7 @@
           <p:cNvPr id="7" name="Slide Number Placeholder 6">
             <a:extLst>
               <a:ext uri="{FF2B5EF4-FFF2-40B4-BE49-F238E27FC236}">
-                <a16:creationId xmlns="" xmlns:a16="http://schemas.microsoft.com/office/drawing/2014/main" id="{25C00798-4D6E-BE51-BCBC-D305B01B7298}"/>
+                <a16:creationId xmlns:a16="http://schemas.microsoft.com/office/drawing/2014/main" id="{25C00798-4D6E-BE51-BCBC-D305B01B7298}"/>
               </a:ext>
             </a:extLst>
           </p:cNvPr>
@@ -1504,7 +1504,7 @@
           <p:cNvPr id="2" name="Title 1">
             <a:extLst>
               <a:ext uri="{FF2B5EF4-FFF2-40B4-BE49-F238E27FC236}">
-                <a16:creationId xmlns="" xmlns:a16="http://schemas.microsoft.com/office/drawing/2014/main" id="{F1F10CED-7681-3EA7-4FA0-0190CEB53306}"/>
+                <a16:creationId xmlns:a16="http://schemas.microsoft.com/office/drawing/2014/main" id="{F1F10CED-7681-3EA7-4FA0-0190CEB53306}"/>
               </a:ext>
             </a:extLst>
           </p:cNvPr>
@@ -1537,7 +1537,7 @@
           <p:cNvPr id="3" name="Text Placeholder 2">
             <a:extLst>
               <a:ext uri="{FF2B5EF4-FFF2-40B4-BE49-F238E27FC236}">
-                <a16:creationId xmlns="" xmlns:a16="http://schemas.microsoft.com/office/drawing/2014/main" id="{2B3DD5F1-B0BD-EF70-2100-8E7E170E56F9}"/>
+                <a16:creationId xmlns:a16="http://schemas.microsoft.com/office/drawing/2014/main" id="{2B3DD5F1-B0BD-EF70-2100-8E7E170E56F9}"/>
               </a:ext>
             </a:extLst>
           </p:cNvPr>
@@ -1608,7 +1608,7 @@
           <p:cNvPr id="4" name="Content Placeholder 3">
             <a:extLst>
               <a:ext uri="{FF2B5EF4-FFF2-40B4-BE49-F238E27FC236}">
-                <a16:creationId xmlns="" xmlns:a16="http://schemas.microsoft.com/office/drawing/2014/main" id="{6552A208-E5C6-1789-215D-3851EDCEB882}"/>
+                <a16:creationId xmlns:a16="http://schemas.microsoft.com/office/drawing/2014/main" id="{6552A208-E5C6-1789-215D-3851EDCEB882}"/>
               </a:ext>
             </a:extLst>
           </p:cNvPr>
@@ -1670,7 +1670,7 @@
           <p:cNvPr id="5" name="Text Placeholder 4">
             <a:extLst>
               <a:ext uri="{FF2B5EF4-FFF2-40B4-BE49-F238E27FC236}">
-                <a16:creationId xmlns="" xmlns:a16="http://schemas.microsoft.com/office/drawing/2014/main" id="{ACFC8032-7CD9-5376-9A2F-78727755E048}"/>
+                <a16:creationId xmlns:a16="http://schemas.microsoft.com/office/drawing/2014/main" id="{ACFC8032-7CD9-5376-9A2F-78727755E048}"/>
               </a:ext>
             </a:extLst>
           </p:cNvPr>
@@ -1741,7 +1741,7 @@
           <p:cNvPr id="6" name="Content Placeholder 5">
             <a:extLst>
               <a:ext uri="{FF2B5EF4-FFF2-40B4-BE49-F238E27FC236}">
-                <a16:creationId xmlns="" xmlns:a16="http://schemas.microsoft.com/office/drawing/2014/main" id="{BA91309E-6CF7-7F0A-CEE7-1F30A2BFFB56}"/>
+                <a16:creationId xmlns:a16="http://schemas.microsoft.com/office/drawing/2014/main" id="{BA91309E-6CF7-7F0A-CEE7-1F30A2BFFB56}"/>
               </a:ext>
             </a:extLst>
           </p:cNvPr>
@@ -1803,7 +1803,7 @@
           <p:cNvPr id="7" name="Date Placeholder 6">
             <a:extLst>
               <a:ext uri="{FF2B5EF4-FFF2-40B4-BE49-F238E27FC236}">
-                <a16:creationId xmlns="" xmlns:a16="http://schemas.microsoft.com/office/drawing/2014/main" id="{CA665801-2ECF-8A71-CEED-6B9CBFDB7E63}"/>
+                <a16:creationId xmlns:a16="http://schemas.microsoft.com/office/drawing/2014/main" id="{CA665801-2ECF-8A71-CEED-6B9CBFDB7E63}"/>
               </a:ext>
             </a:extLst>
           </p:cNvPr>
@@ -1821,7 +1821,7 @@
           <a:p>
             <a:fld id="{3F332693-48B5-49C3-AA51-43C9BC0BDF86}" type="datetimeFigureOut">
               <a:rPr lang="en-US" smtClean="0"/>
-              <a:t>13-02-2024</a:t>
+              <a:t>12/1/2025</a:t>
             </a:fld>
             <a:endParaRPr lang="en-US"/>
           </a:p>
@@ -1832,7 +1832,7 @@
           <p:cNvPr id="8" name="Footer Placeholder 7">
             <a:extLst>
               <a:ext uri="{FF2B5EF4-FFF2-40B4-BE49-F238E27FC236}">
-                <a16:creationId xmlns="" xmlns:a16="http://schemas.microsoft.com/office/drawing/2014/main" id="{6FEB44C0-121C-6F74-A725-B2DE0AD01B77}"/>
+                <a16:creationId xmlns:a16="http://schemas.microsoft.com/office/drawing/2014/main" id="{6FEB44C0-121C-6F74-A725-B2DE0AD01B77}"/>
               </a:ext>
             </a:extLst>
           </p:cNvPr>
@@ -1857,7 +1857,7 @@
           <p:cNvPr id="9" name="Slide Number Placeholder 8">
             <a:extLst>
               <a:ext uri="{FF2B5EF4-FFF2-40B4-BE49-F238E27FC236}">
-                <a16:creationId xmlns="" xmlns:a16="http://schemas.microsoft.com/office/drawing/2014/main" id="{FA683163-2891-5C20-B22A-DF7552454E1D}"/>
+                <a16:creationId xmlns:a16="http://schemas.microsoft.com/office/drawing/2014/main" id="{FA683163-2891-5C20-B22A-DF7552454E1D}"/>
               </a:ext>
             </a:extLst>
           </p:cNvPr>
@@ -1916,7 +1916,7 @@
           <p:cNvPr id="2" name="Title 1">
             <a:extLst>
               <a:ext uri="{FF2B5EF4-FFF2-40B4-BE49-F238E27FC236}">
-                <a16:creationId xmlns="" xmlns:a16="http://schemas.microsoft.com/office/drawing/2014/main" id="{1E208BC7-516A-5A05-74B4-804CAD8D3542}"/>
+                <a16:creationId xmlns:a16="http://schemas.microsoft.com/office/drawing/2014/main" id="{1E208BC7-516A-5A05-74B4-804CAD8D3542}"/>
               </a:ext>
             </a:extLst>
           </p:cNvPr>
@@ -1944,7 +1944,7 @@
           <p:cNvPr id="3" name="Date Placeholder 2">
             <a:extLst>
               <a:ext uri="{FF2B5EF4-FFF2-40B4-BE49-F238E27FC236}">
-                <a16:creationId xmlns="" xmlns:a16="http://schemas.microsoft.com/office/drawing/2014/main" id="{3EC8B97A-8321-0AEC-A8F0-B325947348DD}"/>
+                <a16:creationId xmlns:a16="http://schemas.microsoft.com/office/drawing/2014/main" id="{3EC8B97A-8321-0AEC-A8F0-B325947348DD}"/>
               </a:ext>
             </a:extLst>
           </p:cNvPr>
@@ -1962,7 +1962,7 @@
           <a:p>
             <a:fld id="{3F332693-48B5-49C3-AA51-43C9BC0BDF86}" type="datetimeFigureOut">
               <a:rPr lang="en-US" smtClean="0"/>
-              <a:t>13-02-2024</a:t>
+              <a:t>12/1/2025</a:t>
             </a:fld>
             <a:endParaRPr lang="en-US"/>
           </a:p>
@@ -1973,7 +1973,7 @@
           <p:cNvPr id="4" name="Footer Placeholder 3">
             <a:extLst>
               <a:ext uri="{FF2B5EF4-FFF2-40B4-BE49-F238E27FC236}">
-                <a16:creationId xmlns="" xmlns:a16="http://schemas.microsoft.com/office/drawing/2014/main" id="{F5A7867C-72B6-26C7-FE9A-CD791757ABAD}"/>
+                <a16:creationId xmlns:a16="http://schemas.microsoft.com/office/drawing/2014/main" id="{F5A7867C-72B6-26C7-FE9A-CD791757ABAD}"/>
               </a:ext>
             </a:extLst>
           </p:cNvPr>
@@ -1998,7 +1998,7 @@
           <p:cNvPr id="5" name="Slide Number Placeholder 4">
             <a:extLst>
               <a:ext uri="{FF2B5EF4-FFF2-40B4-BE49-F238E27FC236}">
-                <a16:creationId xmlns="" xmlns:a16="http://schemas.microsoft.com/office/drawing/2014/main" id="{11C1F4EA-EBD2-5671-16D3-CBB974911F54}"/>
+                <a16:creationId xmlns:a16="http://schemas.microsoft.com/office/drawing/2014/main" id="{11C1F4EA-EBD2-5671-16D3-CBB974911F54}"/>
               </a:ext>
             </a:extLst>
           </p:cNvPr>
@@ -2057,7 +2057,7 @@
           <p:cNvPr id="2" name="Date Placeholder 1">
             <a:extLst>
               <a:ext uri="{FF2B5EF4-FFF2-40B4-BE49-F238E27FC236}">
-                <a16:creationId xmlns="" xmlns:a16="http://schemas.microsoft.com/office/drawing/2014/main" id="{714BF848-71FF-B69E-E05D-388FD381523B}"/>
+                <a16:creationId xmlns:a16="http://schemas.microsoft.com/office/drawing/2014/main" id="{714BF848-71FF-B69E-E05D-388FD381523B}"/>
               </a:ext>
             </a:extLst>
           </p:cNvPr>
@@ -2075,7 +2075,7 @@
           <a:p>
             <a:fld id="{3F332693-48B5-49C3-AA51-43C9BC0BDF86}" type="datetimeFigureOut">
               <a:rPr lang="en-US" smtClean="0"/>
-              <a:t>13-02-2024</a:t>
+              <a:t>12/1/2025</a:t>
             </a:fld>
             <a:endParaRPr lang="en-US"/>
           </a:p>
@@ -2086,7 +2086,7 @@
           <p:cNvPr id="3" name="Footer Placeholder 2">
             <a:extLst>
               <a:ext uri="{FF2B5EF4-FFF2-40B4-BE49-F238E27FC236}">
-                <a16:creationId xmlns="" xmlns:a16="http://schemas.microsoft.com/office/drawing/2014/main" id="{63B0CFBA-87EA-BCC0-CDE4-07FEC868A347}"/>
+                <a16:creationId xmlns:a16="http://schemas.microsoft.com/office/drawing/2014/main" id="{63B0CFBA-87EA-BCC0-CDE4-07FEC868A347}"/>
               </a:ext>
             </a:extLst>
           </p:cNvPr>
@@ -2111,7 +2111,7 @@
           <p:cNvPr id="4" name="Slide Number Placeholder 3">
             <a:extLst>
               <a:ext uri="{FF2B5EF4-FFF2-40B4-BE49-F238E27FC236}">
-                <a16:creationId xmlns="" xmlns:a16="http://schemas.microsoft.com/office/drawing/2014/main" id="{C770F1B5-5DE1-88A5-4F23-4166E6D0DAF9}"/>
+                <a16:creationId xmlns:a16="http://schemas.microsoft.com/office/drawing/2014/main" id="{C770F1B5-5DE1-88A5-4F23-4166E6D0DAF9}"/>
               </a:ext>
             </a:extLst>
           </p:cNvPr>
@@ -2170,7 +2170,7 @@
           <p:cNvPr id="2" name="Title 1">
             <a:extLst>
               <a:ext uri="{FF2B5EF4-FFF2-40B4-BE49-F238E27FC236}">
-                <a16:creationId xmlns="" xmlns:a16="http://schemas.microsoft.com/office/drawing/2014/main" id="{EF710F82-8AB1-8E52-2D92-CDA871CF4382}"/>
+                <a16:creationId xmlns:a16="http://schemas.microsoft.com/office/drawing/2014/main" id="{EF710F82-8AB1-8E52-2D92-CDA871CF4382}"/>
               </a:ext>
             </a:extLst>
           </p:cNvPr>
@@ -2207,7 +2207,7 @@
           <p:cNvPr id="3" name="Content Placeholder 2">
             <a:extLst>
               <a:ext uri="{FF2B5EF4-FFF2-40B4-BE49-F238E27FC236}">
-                <a16:creationId xmlns="" xmlns:a16="http://schemas.microsoft.com/office/drawing/2014/main" id="{1B5492FF-DE8A-BDB0-803C-689A9BF01D53}"/>
+                <a16:creationId xmlns:a16="http://schemas.microsoft.com/office/drawing/2014/main" id="{1B5492FF-DE8A-BDB0-803C-689A9BF01D53}"/>
               </a:ext>
             </a:extLst>
           </p:cNvPr>
@@ -2297,7 +2297,7 @@
           <p:cNvPr id="4" name="Text Placeholder 3">
             <a:extLst>
               <a:ext uri="{FF2B5EF4-FFF2-40B4-BE49-F238E27FC236}">
-                <a16:creationId xmlns="" xmlns:a16="http://schemas.microsoft.com/office/drawing/2014/main" id="{EE6AFB79-4397-5047-AD66-B46E4E2D3AE2}"/>
+                <a16:creationId xmlns:a16="http://schemas.microsoft.com/office/drawing/2014/main" id="{EE6AFB79-4397-5047-AD66-B46E4E2D3AE2}"/>
               </a:ext>
             </a:extLst>
           </p:cNvPr>
@@ -2368,7 +2368,7 @@
           <p:cNvPr id="5" name="Date Placeholder 4">
             <a:extLst>
               <a:ext uri="{FF2B5EF4-FFF2-40B4-BE49-F238E27FC236}">
-                <a16:creationId xmlns="" xmlns:a16="http://schemas.microsoft.com/office/drawing/2014/main" id="{75459977-E118-0FB9-F754-08E036557636}"/>
+                <a16:creationId xmlns:a16="http://schemas.microsoft.com/office/drawing/2014/main" id="{75459977-E118-0FB9-F754-08E036557636}"/>
               </a:ext>
             </a:extLst>
           </p:cNvPr>
@@ -2386,7 +2386,7 @@
           <a:p>
             <a:fld id="{3F332693-48B5-49C3-AA51-43C9BC0BDF86}" type="datetimeFigureOut">
               <a:rPr lang="en-US" smtClean="0"/>
-              <a:t>13-02-2024</a:t>
+              <a:t>12/1/2025</a:t>
             </a:fld>
             <a:endParaRPr lang="en-US"/>
           </a:p>
@@ -2397,7 +2397,7 @@
           <p:cNvPr id="6" name="Footer Placeholder 5">
             <a:extLst>
               <a:ext uri="{FF2B5EF4-FFF2-40B4-BE49-F238E27FC236}">
-                <a16:creationId xmlns="" xmlns:a16="http://schemas.microsoft.com/office/drawing/2014/main" id="{1B3F17A0-8554-8996-A2A4-B89DC9E75F86}"/>
+                <a16:creationId xmlns:a16="http://schemas.microsoft.com/office/drawing/2014/main" id="{1B3F17A0-8554-8996-A2A4-B89DC9E75F86}"/>
               </a:ext>
             </a:extLst>
           </p:cNvPr>
@@ -2422,7 +2422,7 @@
           <p:cNvPr id="7" name="Slide Number Placeholder 6">
             <a:extLst>
               <a:ext uri="{FF2B5EF4-FFF2-40B4-BE49-F238E27FC236}">
-                <a16:creationId xmlns="" xmlns:a16="http://schemas.microsoft.com/office/drawing/2014/main" id="{8B360DC4-126F-73C7-A1C6-E09D0409E9EF}"/>
+                <a16:creationId xmlns:a16="http://schemas.microsoft.com/office/drawing/2014/main" id="{8B360DC4-126F-73C7-A1C6-E09D0409E9EF}"/>
               </a:ext>
             </a:extLst>
           </p:cNvPr>
@@ -2481,7 +2481,7 @@
           <p:cNvPr id="2" name="Title 1">
             <a:extLst>
               <a:ext uri="{FF2B5EF4-FFF2-40B4-BE49-F238E27FC236}">
-                <a16:creationId xmlns="" xmlns:a16="http://schemas.microsoft.com/office/drawing/2014/main" id="{24B46D0F-4A05-1407-0366-427CBE579924}"/>
+                <a16:creationId xmlns:a16="http://schemas.microsoft.com/office/drawing/2014/main" id="{24B46D0F-4A05-1407-0366-427CBE579924}"/>
               </a:ext>
             </a:extLst>
           </p:cNvPr>
@@ -2518,7 +2518,7 @@
           <p:cNvPr id="3" name="Picture Placeholder 2">
             <a:extLst>
               <a:ext uri="{FF2B5EF4-FFF2-40B4-BE49-F238E27FC236}">
-                <a16:creationId xmlns="" xmlns:a16="http://schemas.microsoft.com/office/drawing/2014/main" id="{483B3CD8-AE69-6BA4-1B7C-2EF9794670FA}"/>
+                <a16:creationId xmlns:a16="http://schemas.microsoft.com/office/drawing/2014/main" id="{483B3CD8-AE69-6BA4-1B7C-2EF9794670FA}"/>
               </a:ext>
             </a:extLst>
           </p:cNvPr>
@@ -2585,7 +2585,7 @@
           <p:cNvPr id="4" name="Text Placeholder 3">
             <a:extLst>
               <a:ext uri="{FF2B5EF4-FFF2-40B4-BE49-F238E27FC236}">
-                <a16:creationId xmlns="" xmlns:a16="http://schemas.microsoft.com/office/drawing/2014/main" id="{A7D26975-298D-FCA7-84D0-CCBAD79A0B9B}"/>
+                <a16:creationId xmlns:a16="http://schemas.microsoft.com/office/drawing/2014/main" id="{A7D26975-298D-FCA7-84D0-CCBAD79A0B9B}"/>
               </a:ext>
             </a:extLst>
           </p:cNvPr>
@@ -2656,7 +2656,7 @@
           <p:cNvPr id="5" name="Date Placeholder 4">
             <a:extLst>
               <a:ext uri="{FF2B5EF4-FFF2-40B4-BE49-F238E27FC236}">
-                <a16:creationId xmlns="" xmlns:a16="http://schemas.microsoft.com/office/drawing/2014/main" id="{4991C9F4-7046-CD4B-D183-C59BAE265ADA}"/>
+                <a16:creationId xmlns:a16="http://schemas.microsoft.com/office/drawing/2014/main" id="{4991C9F4-7046-CD4B-D183-C59BAE265ADA}"/>
               </a:ext>
             </a:extLst>
           </p:cNvPr>
@@ -2674,7 +2674,7 @@
           <a:p>
             <a:fld id="{3F332693-48B5-49C3-AA51-43C9BC0BDF86}" type="datetimeFigureOut">
               <a:rPr lang="en-US" smtClean="0"/>
-              <a:t>13-02-2024</a:t>
+              <a:t>12/1/2025</a:t>
             </a:fld>
             <a:endParaRPr lang="en-US"/>
           </a:p>
@@ -2685,7 +2685,7 @@
           <p:cNvPr id="6" name="Footer Placeholder 5">
             <a:extLst>
               <a:ext uri="{FF2B5EF4-FFF2-40B4-BE49-F238E27FC236}">
-                <a16:creationId xmlns="" xmlns:a16="http://schemas.microsoft.com/office/drawing/2014/main" id="{4FE6FBD1-02B2-480D-C6A2-B7E4AD2FEB2C}"/>
+                <a16:creationId xmlns:a16="http://schemas.microsoft.com/office/drawing/2014/main" id="{4FE6FBD1-02B2-480D-C6A2-B7E4AD2FEB2C}"/>
               </a:ext>
             </a:extLst>
           </p:cNvPr>
@@ -2710,7 +2710,7 @@
           <p:cNvPr id="7" name="Slide Number Placeholder 6">
             <a:extLst>
               <a:ext uri="{FF2B5EF4-FFF2-40B4-BE49-F238E27FC236}">
-                <a16:creationId xmlns="" xmlns:a16="http://schemas.microsoft.com/office/drawing/2014/main" id="{323655FE-D832-8022-2999-3BD92232EDD8}"/>
+                <a16:creationId xmlns:a16="http://schemas.microsoft.com/office/drawing/2014/main" id="{323655FE-D832-8022-2999-3BD92232EDD8}"/>
               </a:ext>
             </a:extLst>
           </p:cNvPr>
@@ -2774,7 +2774,7 @@
           <p:cNvPr id="2" name="Title Placeholder 1">
             <a:extLst>
               <a:ext uri="{FF2B5EF4-FFF2-40B4-BE49-F238E27FC236}">
-                <a16:creationId xmlns="" xmlns:a16="http://schemas.microsoft.com/office/drawing/2014/main" id="{CD12AC19-C182-89AC-E600-0F56C37CA0A8}"/>
+                <a16:creationId xmlns:a16="http://schemas.microsoft.com/office/drawing/2014/main" id="{CD12AC19-C182-89AC-E600-0F56C37CA0A8}"/>
               </a:ext>
             </a:extLst>
           </p:cNvPr>
@@ -2812,7 +2812,7 @@
           <p:cNvPr id="3" name="Text Placeholder 2">
             <a:extLst>
               <a:ext uri="{FF2B5EF4-FFF2-40B4-BE49-F238E27FC236}">
-                <a16:creationId xmlns="" xmlns:a16="http://schemas.microsoft.com/office/drawing/2014/main" id="{4F62F311-AE78-F3AC-A431-73368AAD277E}"/>
+                <a16:creationId xmlns:a16="http://schemas.microsoft.com/office/drawing/2014/main" id="{4F62F311-AE78-F3AC-A431-73368AAD277E}"/>
               </a:ext>
             </a:extLst>
           </p:cNvPr>
@@ -2879,7 +2879,7 @@
           <p:cNvPr id="4" name="Date Placeholder 3">
             <a:extLst>
               <a:ext uri="{FF2B5EF4-FFF2-40B4-BE49-F238E27FC236}">
-                <a16:creationId xmlns="" xmlns:a16="http://schemas.microsoft.com/office/drawing/2014/main" id="{701BC818-02F8-6FF9-11EB-E2517B4547C7}"/>
+                <a16:creationId xmlns:a16="http://schemas.microsoft.com/office/drawing/2014/main" id="{701BC818-02F8-6FF9-11EB-E2517B4547C7}"/>
               </a:ext>
             </a:extLst>
           </p:cNvPr>
@@ -2915,7 +2915,7 @@
           <a:p>
             <a:fld id="{3F332693-48B5-49C3-AA51-43C9BC0BDF86}" type="datetimeFigureOut">
               <a:rPr lang="en-US" smtClean="0"/>
-              <a:t>13-02-2024</a:t>
+              <a:t>12/1/2025</a:t>
             </a:fld>
             <a:endParaRPr lang="en-US"/>
           </a:p>
@@ -2926,7 +2926,7 @@
           <p:cNvPr id="5" name="Footer Placeholder 4">
             <a:extLst>
               <a:ext uri="{FF2B5EF4-FFF2-40B4-BE49-F238E27FC236}">
-                <a16:creationId xmlns="" xmlns:a16="http://schemas.microsoft.com/office/drawing/2014/main" id="{06AB64C3-FFD5-2844-B7C6-EF8480C98B58}"/>
+                <a16:creationId xmlns:a16="http://schemas.microsoft.com/office/drawing/2014/main" id="{06AB64C3-FFD5-2844-B7C6-EF8480C98B58}"/>
               </a:ext>
             </a:extLst>
           </p:cNvPr>
@@ -2969,7 +2969,7 @@
           <p:cNvPr id="6" name="Slide Number Placeholder 5">
             <a:extLst>
               <a:ext uri="{FF2B5EF4-FFF2-40B4-BE49-F238E27FC236}">
-                <a16:creationId xmlns="" xmlns:a16="http://schemas.microsoft.com/office/drawing/2014/main" id="{5190FB88-B167-D990-2A8B-2FA369CE3E6D}"/>
+                <a16:creationId xmlns:a16="http://schemas.microsoft.com/office/drawing/2014/main" id="{5190FB88-B167-D990-2A8B-2FA369CE3E6D}"/>
               </a:ext>
             </a:extLst>
           </p:cNvPr>
@@ -3337,7 +3337,7 @@
           <p:cNvPr id="2" name="Title 1">
             <a:extLst>
               <a:ext uri="{FF2B5EF4-FFF2-40B4-BE49-F238E27FC236}">
-                <a16:creationId xmlns="" xmlns:a16="http://schemas.microsoft.com/office/drawing/2014/main" id="{213E1E1F-07F2-87F3-70E3-6DE1B5E93299}"/>
+                <a16:creationId xmlns:a16="http://schemas.microsoft.com/office/drawing/2014/main" id="{213E1E1F-07F2-87F3-70E3-6DE1B5E93299}"/>
               </a:ext>
             </a:extLst>
           </p:cNvPr>
@@ -3379,7 +3379,7 @@
           <p:cNvPr id="3" name="Subtitle 2">
             <a:extLst>
               <a:ext uri="{FF2B5EF4-FFF2-40B4-BE49-F238E27FC236}">
-                <a16:creationId xmlns="" xmlns:a16="http://schemas.microsoft.com/office/drawing/2014/main" id="{4C1A157E-4ED5-F884-A9C6-5ADCA5B40561}"/>
+                <a16:creationId xmlns:a16="http://schemas.microsoft.com/office/drawing/2014/main" id="{4C1A157E-4ED5-F884-A9C6-5ADCA5B40561}"/>
               </a:ext>
             </a:extLst>
           </p:cNvPr>
@@ -3494,7 +3494,7 @@
           <p:cNvPr id="2" name="Title 1">
             <a:extLst>
               <a:ext uri="{FF2B5EF4-FFF2-40B4-BE49-F238E27FC236}">
-                <a16:creationId xmlns="" xmlns:a16="http://schemas.microsoft.com/office/drawing/2014/main" id="{79A5DE07-1309-FCC5-4535-27633D2399F8}"/>
+                <a16:creationId xmlns:a16="http://schemas.microsoft.com/office/drawing/2014/main" id="{79A5DE07-1309-FCC5-4535-27633D2399F8}"/>
               </a:ext>
             </a:extLst>
           </p:cNvPr>
@@ -3519,10 +3519,10 @@
       </p:sp>
       <p:sp>
         <p:nvSpPr>
-          <p:cNvPr id="3" name="Content Placeholder 2">
-            <a:extLst>
-              <a:ext uri="{FF2B5EF4-FFF2-40B4-BE49-F238E27FC236}">
-                <a16:creationId xmlns="" xmlns:a16="http://schemas.microsoft.com/office/drawing/2014/main" id="{9D44995E-0B30-4D19-CA75-941CC370224E}"/>
+          <p:cNvPr id="7" name="Content Placeholder 6">
+            <a:extLst>
+              <a:ext uri="{FF2B5EF4-FFF2-40B4-BE49-F238E27FC236}">
+                <a16:creationId xmlns:a16="http://schemas.microsoft.com/office/drawing/2014/main" id="{3313B078-F405-FA6D-73BC-FCF38878C2C2}"/>
               </a:ext>
             </a:extLst>
           </p:cNvPr>
@@ -3580,7 +3580,7 @@
           <p:cNvPr id="2" name="Title 1">
             <a:extLst>
               <a:ext uri="{FF2B5EF4-FFF2-40B4-BE49-F238E27FC236}">
-                <a16:creationId xmlns="" xmlns:a16="http://schemas.microsoft.com/office/drawing/2014/main" id="{70903BCB-C1F8-4D9C-114C-09D7613D67DC}"/>
+                <a16:creationId xmlns:a16="http://schemas.microsoft.com/office/drawing/2014/main" id="{70903BCB-C1F8-4D9C-114C-09D7613D67DC}"/>
               </a:ext>
             </a:extLst>
           </p:cNvPr>
@@ -3600,31 +3600,41 @@
           </a:p>
         </p:txBody>
       </p:sp>
-      <p:sp>
-        <p:nvSpPr>
-          <p:cNvPr id="3" name="Content Placeholder 2">
-            <a:extLst>
-              <a:ext uri="{FF2B5EF4-FFF2-40B4-BE49-F238E27FC236}">
-                <a16:creationId xmlns="" xmlns:a16="http://schemas.microsoft.com/office/drawing/2014/main" id="{EE2EAAAE-2DDD-C92F-F5BE-1952C55933A4}"/>
-              </a:ext>
-            </a:extLst>
-          </p:cNvPr>
-          <p:cNvSpPr>
-            <a:spLocks noGrp="1"/>
-          </p:cNvSpPr>
+      <p:pic>
+        <p:nvPicPr>
+          <p:cNvPr id="5" name="Content Placeholder 4">
+            <a:extLst>
+              <a:ext uri="{FF2B5EF4-FFF2-40B4-BE49-F238E27FC236}">
+                <a16:creationId xmlns:a16="http://schemas.microsoft.com/office/drawing/2014/main" id="{4EFA36AE-E6B5-F7AF-EC27-061EEA4DC6B4}"/>
+              </a:ext>
+            </a:extLst>
+          </p:cNvPr>
+          <p:cNvPicPr>
+            <a:picLocks noGrp="1" noChangeAspect="1"/>
+          </p:cNvPicPr>
           <p:nvPr>
             <p:ph idx="1"/>
           </p:nvPr>
-        </p:nvSpPr>
-        <p:spPr/>
-        <p:txBody>
-          <a:bodyPr/>
-          <a:lstStyle/>
-          <a:p>
-            <a:endParaRPr lang="en-US"/>
-          </a:p>
-        </p:txBody>
-      </p:sp>
+        </p:nvPicPr>
+        <p:blipFill>
+          <a:blip r:embed="rId2">
+            <a:extLst>
+              <a:ext uri="{28A0092B-C50C-407E-A947-70E740481C1C}">
+                <a14:useLocalDpi xmlns:a14="http://schemas.microsoft.com/office/drawing/2010/main" val="0"/>
+              </a:ext>
+            </a:extLst>
+          </a:blip>
+          <a:stretch>
+            <a:fillRect/>
+          </a:stretch>
+        </p:blipFill>
+        <p:spPr>
+          <a:xfrm>
+            <a:off x="0" y="0"/>
+            <a:ext cx="12192000" cy="6858000"/>
+          </a:xfrm>
+        </p:spPr>
+      </p:pic>
     </p:spTree>
     <p:extLst>
       <p:ext uri="{BB962C8B-B14F-4D97-AF65-F5344CB8AC3E}">
@@ -3638,13 +3648,6 @@
   <p:transition spd="slow">
     <p:push dir="u"/>
   </p:transition>
-  <p:timing>
-    <p:tnLst>
-      <p:par>
-        <p:cTn id="1" dur="indefinite" restart="never" nodeType="tmRoot"/>
-      </p:par>
-    </p:tnLst>
-  </p:timing>
 </p:sld>
 </file>
 
@@ -3670,7 +3673,7 @@
           <p:cNvPr id="2" name="Title 1">
             <a:extLst>
               <a:ext uri="{FF2B5EF4-FFF2-40B4-BE49-F238E27FC236}">
-                <a16:creationId xmlns="" xmlns:a16="http://schemas.microsoft.com/office/drawing/2014/main" id="{5FC64982-19E6-9B2F-ADC2-763258B34ABD}"/>
+                <a16:creationId xmlns:a16="http://schemas.microsoft.com/office/drawing/2014/main" id="{5FC64982-19E6-9B2F-ADC2-763258B34ABD}"/>
               </a:ext>
             </a:extLst>
           </p:cNvPr>
@@ -3704,7 +3707,7 @@
           <p:cNvPr id="3" name="Content Placeholder 2">
             <a:extLst>
               <a:ext uri="{FF2B5EF4-FFF2-40B4-BE49-F238E27FC236}">
-                <a16:creationId xmlns="" xmlns:a16="http://schemas.microsoft.com/office/drawing/2014/main" id="{5B92842B-955E-6D28-F172-AB6E34066659}"/>
+                <a16:creationId xmlns:a16="http://schemas.microsoft.com/office/drawing/2014/main" id="{5B92842B-955E-6D28-F172-AB6E34066659}"/>
               </a:ext>
             </a:extLst>
           </p:cNvPr>
@@ -3728,24 +3731,15 @@
           <a:lstStyle/>
           <a:p>
             <a:r>
-              <a:rPr lang="en-US" sz="2000" dirty="0" smtClean="0"/>
-              <a:t>Open </a:t>
-            </a:r>
-            <a:r>
               <a:rPr lang="en-US" sz="2000" dirty="0"/>
-              <a:t>to all dance levels and styles</a:t>
-            </a:r>
-            <a:r>
-              <a:rPr lang="en-US" sz="2000" dirty="0" smtClean="0"/>
-              <a:t>.</a:t>
-            </a:r>
-          </a:p>
-          <a:p>
-            <a:r>
-              <a:rPr lang="en-US" sz="2000" dirty="0" smtClean="0"/>
+              <a:t>Open to all dance levels and styles.</a:t>
+            </a:r>
+          </a:p>
+          <a:p>
+            <a:r>
+              <a:rPr lang="en-US" sz="2000" dirty="0"/>
               <a:t>Classes are Wednesday evening </a:t>
             </a:r>
-            <a:endParaRPr lang="en-US" sz="2000" dirty="0"/>
           </a:p>
           <a:p>
             <a:r>
@@ -3755,12 +3749,8 @@
           </a:p>
           <a:p>
             <a:r>
-              <a:rPr lang="en-US" sz="2000" dirty="0" smtClean="0"/>
-              <a:t>Membership </a:t>
-            </a:r>
-            <a:r>
               <a:rPr lang="en-US" sz="2000" dirty="0"/>
-              <a:t>is free</a:t>
+              <a:t>Membership is free</a:t>
             </a:r>
           </a:p>
         </p:txBody>
@@ -4297,7 +4287,7 @@
           <p:cNvPr id="2" name="Title 1">
             <a:extLst>
               <a:ext uri="{FF2B5EF4-FFF2-40B4-BE49-F238E27FC236}">
-                <a16:creationId xmlns="" xmlns:a16="http://schemas.microsoft.com/office/drawing/2014/main" id="{2EBEB2E1-EFCE-6281-84DF-40854D37D5B2}"/>
+                <a16:creationId xmlns:a16="http://schemas.microsoft.com/office/drawing/2014/main" id="{2EBEB2E1-EFCE-6281-84DF-40854D37D5B2}"/>
               </a:ext>
             </a:extLst>
           </p:cNvPr>
@@ -4325,7 +4315,7 @@
           <p:cNvPr id="3" name="Content Placeholder 2">
             <a:extLst>
               <a:ext uri="{FF2B5EF4-FFF2-40B4-BE49-F238E27FC236}">
-                <a16:creationId xmlns="" xmlns:a16="http://schemas.microsoft.com/office/drawing/2014/main" id="{A89AB991-B560-210A-5CA0-0D6A526C9D40}"/>
+                <a16:creationId xmlns:a16="http://schemas.microsoft.com/office/drawing/2014/main" id="{A89AB991-B560-210A-5CA0-0D6A526C9D40}"/>
               </a:ext>
             </a:extLst>
           </p:cNvPr>
@@ -4353,13 +4343,8 @@
             </a:pPr>
             <a:r>
               <a:rPr lang="en-US" dirty="0"/>
-              <a:t>Practice, play, live an </a:t>
-            </a:r>
-            <a:r>
-              <a:rPr lang="en-US" dirty="0" smtClean="0"/>
-              <a:t>learn</a:t>
-            </a:r>
-            <a:endParaRPr lang="en-US" dirty="0"/>
+              <a:t>Practice, play, live an learn</a:t>
+            </a:r>
           </a:p>
         </p:txBody>
       </p:sp>
@@ -4515,7 +4500,7 @@
           <p:cNvPr id="2" name="Title 1">
             <a:extLst>
               <a:ext uri="{FF2B5EF4-FFF2-40B4-BE49-F238E27FC236}">
-                <a16:creationId xmlns="" xmlns:a16="http://schemas.microsoft.com/office/drawing/2014/main" id="{A5CE9AA0-96D3-82CE-5656-7BA4A7E39DB4}"/>
+                <a16:creationId xmlns:a16="http://schemas.microsoft.com/office/drawing/2014/main" id="{A5CE9AA0-96D3-82CE-5656-7BA4A7E39DB4}"/>
               </a:ext>
             </a:extLst>
           </p:cNvPr>
@@ -4571,7 +4556,7 @@
         </p:blipFill>
         <p:spPr>
           <a:xfrm>
-            <a:off x="439521" y="365124"/>
+            <a:off x="494080" y="365123"/>
             <a:ext cx="6526544" cy="5846171"/>
           </a:xfrm>
           <a:prstGeom prst="rect">
@@ -4649,62 +4634,146 @@
           <a:lstStyle/>
           <a:p>
             <a:r>
-              <a:rPr lang="en-US" dirty="0" smtClean="0">
-                <a:solidFill>
-                  <a:schemeClr val="bg1"/>
-                </a:solidFill>
-              </a:rPr>
-              <a:t>Open </a:t>
-            </a:r>
-            <a:r>
               <a:rPr lang="en-US" dirty="0">
                 <a:solidFill>
                   <a:schemeClr val="bg1"/>
                 </a:solidFill>
               </a:rPr>
-              <a:t>to students of all levels </a:t>
-            </a:r>
-            <a:endParaRPr lang="en-US" dirty="0" smtClean="0">
-              <a:solidFill>
-                <a:schemeClr val="bg1"/>
-              </a:solidFill>
-            </a:endParaRPr>
-          </a:p>
-          <a:p>
-            <a:r>
-              <a:rPr lang="en-US" dirty="0" smtClean="0">
-                <a:solidFill>
-                  <a:schemeClr val="bg1"/>
-                </a:solidFill>
-              </a:rPr>
-              <a:t>Competitive </a:t>
-            </a:r>
+              <a:t>Open to students of all levels </a:t>
+            </a:r>
+          </a:p>
+          <a:p>
             <a:r>
               <a:rPr lang="en-US" dirty="0">
                 <a:solidFill>
                   <a:schemeClr val="bg1"/>
                 </a:solidFill>
               </a:rPr>
-              <a:t>and non-competitive play</a:t>
-            </a:r>
-          </a:p>
-          <a:p>
-            <a:r>
-              <a:rPr lang="en-US" dirty="0" smtClean="0">
+              <a:t>Competitive and non-competitive play</a:t>
+            </a:r>
+          </a:p>
+          <a:p>
+            <a:r>
+              <a:rPr lang="en-US" dirty="0">
                 <a:solidFill>
                   <a:schemeClr val="bg1"/>
                 </a:solidFill>
               </a:rPr>
               <a:t>Free</a:t>
             </a:r>
-            <a:endParaRPr lang="en-US" dirty="0">
-              <a:solidFill>
-                <a:schemeClr val="bg1"/>
-              </a:solidFill>
-            </a:endParaRPr>
-          </a:p>
-        </p:txBody>
-      </p:sp>
+          </a:p>
+        </p:txBody>
+      </p:sp>
+      <p:pic>
+        <p:nvPicPr>
+          <p:cNvPr id="6" name="Swimer"/>
+          <p:cNvPicPr>
+            <a:picLocks noChangeAspect="1"/>
+          </p:cNvPicPr>
+          <p:nvPr/>
+        </p:nvPicPr>
+        <p:blipFill rotWithShape="1">
+          <a:blip r:embed="rId3" cstate="email">
+            <a:extLst>
+              <a:ext uri="{28A0092B-C50C-407E-A947-70E740481C1C}">
+                <a14:useLocalDpi xmlns:a14="http://schemas.microsoft.com/office/drawing/2010/main"/>
+              </a:ext>
+            </a:extLst>
+          </a:blip>
+          <a:srcRect/>
+          <a:stretch/>
+        </p:blipFill>
+        <p:spPr>
+          <a:xfrm>
+            <a:off x="1014151" y="3988875"/>
+            <a:ext cx="2708031" cy="1670539"/>
+          </a:xfrm>
+          <a:prstGeom prst="rect">
+            <a:avLst/>
+          </a:prstGeom>
+        </p:spPr>
+      </p:pic>
+      <p:pic>
+        <p:nvPicPr>
+          <p:cNvPr id="7" name="Yogaer"/>
+          <p:cNvPicPr>
+            <a:picLocks noChangeAspect="1"/>
+          </p:cNvPicPr>
+          <p:nvPr/>
+        </p:nvPicPr>
+        <p:blipFill rotWithShape="1">
+          <a:blip r:embed="rId4" cstate="email">
+            <a:extLst>
+              <a:ext uri="{28A0092B-C50C-407E-A947-70E740481C1C}">
+                <a14:useLocalDpi xmlns:a14="http://schemas.microsoft.com/office/drawing/2010/main"/>
+              </a:ext>
+            </a:extLst>
+          </a:blip>
+          <a:srcRect/>
+          <a:stretch/>
+        </p:blipFill>
+        <p:spPr>
+          <a:xfrm>
+            <a:off x="4237891" y="3004137"/>
+            <a:ext cx="2303586" cy="2655277"/>
+          </a:xfrm>
+          <a:prstGeom prst="rect">
+            <a:avLst/>
+          </a:prstGeom>
+        </p:spPr>
+      </p:pic>
+      <p:pic>
+        <p:nvPicPr>
+          <p:cNvPr id="11" name="Runer"/>
+          <p:cNvPicPr>
+            <a:picLocks noChangeAspect="1"/>
+          </p:cNvPicPr>
+          <p:nvPr/>
+        </p:nvPicPr>
+        <p:blipFill rotWithShape="1">
+          <a:blip r:embed="rId2"/>
+          <a:srcRect l="7181" t="9789" r="51056" b="46897"/>
+          <a:stretch/>
+        </p:blipFill>
+        <p:spPr>
+          <a:xfrm>
+            <a:off x="985593" y="939981"/>
+            <a:ext cx="2725616" cy="2532185"/>
+          </a:xfrm>
+          <a:prstGeom prst="rect">
+            <a:avLst/>
+          </a:prstGeom>
+        </p:spPr>
+      </p:pic>
+      <p:pic>
+        <p:nvPicPr>
+          <p:cNvPr id="12" name="Soccer"/>
+          <p:cNvPicPr>
+            <a:picLocks noChangeAspect="1"/>
+          </p:cNvPicPr>
+          <p:nvPr/>
+        </p:nvPicPr>
+        <p:blipFill rotWithShape="1">
+          <a:blip r:embed="rId5" cstate="email">
+            <a:extLst>
+              <a:ext uri="{28A0092B-C50C-407E-A947-70E740481C1C}">
+                <a14:useLocalDpi xmlns:a14="http://schemas.microsoft.com/office/drawing/2010/main"/>
+              </a:ext>
+            </a:extLst>
+          </a:blip>
+          <a:srcRect/>
+          <a:stretch/>
+        </p:blipFill>
+        <p:spPr>
+          <a:xfrm>
+            <a:off x="4237891" y="922459"/>
+            <a:ext cx="2286001" cy="1582616"/>
+          </a:xfrm>
+          <a:prstGeom prst="rect">
+            <a:avLst/>
+          </a:prstGeom>
+        </p:spPr>
+      </p:pic>
     </p:spTree>
     <p:extLst>
       <p:ext uri="{BB962C8B-B14F-4D97-AF65-F5344CB8AC3E}">
@@ -4757,25 +4826,41 @@
           </a:p>
         </p:txBody>
       </p:sp>
-      <p:sp>
-        <p:nvSpPr>
-          <p:cNvPr id="3" name="Content Placeholder 2"/>
-          <p:cNvSpPr>
-            <a:spLocks noGrp="1"/>
-          </p:cNvSpPr>
+      <p:pic>
+        <p:nvPicPr>
+          <p:cNvPr id="5" name="Content Placeholder 4">
+            <a:extLst>
+              <a:ext uri="{FF2B5EF4-FFF2-40B4-BE49-F238E27FC236}">
+                <a16:creationId xmlns:a16="http://schemas.microsoft.com/office/drawing/2014/main" id="{CB25571C-79DE-5067-CC9B-D2A0F6773F3C}"/>
+              </a:ext>
+            </a:extLst>
+          </p:cNvPr>
+          <p:cNvPicPr>
+            <a:picLocks noGrp="1" noChangeAspect="1"/>
+          </p:cNvPicPr>
           <p:nvPr>
             <p:ph idx="1"/>
           </p:nvPr>
-        </p:nvSpPr>
-        <p:spPr/>
-        <p:txBody>
-          <a:bodyPr/>
-          <a:lstStyle/>
-          <a:p>
-            <a:endParaRPr lang="vi-VN"/>
-          </a:p>
-        </p:txBody>
-      </p:sp>
+        </p:nvPicPr>
+        <p:blipFill>
+          <a:blip r:embed="rId2">
+            <a:extLst>
+              <a:ext uri="{28A0092B-C50C-407E-A947-70E740481C1C}">
+                <a14:useLocalDpi xmlns:a14="http://schemas.microsoft.com/office/drawing/2010/main" val="0"/>
+              </a:ext>
+            </a:extLst>
+          </a:blip>
+          <a:stretch>
+            <a:fillRect/>
+          </a:stretch>
+        </p:blipFill>
+        <p:spPr>
+          <a:xfrm>
+            <a:off x="0" y="1"/>
+            <a:ext cx="12151150" cy="6858000"/>
+          </a:xfrm>
+        </p:spPr>
+      </p:pic>
     </p:spTree>
     <p:extLst>
       <p:ext uri="{BB962C8B-B14F-4D97-AF65-F5344CB8AC3E}">
